--- a/docs/World_Model_Brake_System_30slide_中文模板_OMML.pptx
+++ b/docs/World_Model_Brake_System_30slide_中文模板_OMML.pptx
@@ -183,12 +183,12 @@
     </p:ext>
     <p:ext uri="{EFAFB233-063F-42B5-8137-9DF3F51BA10A}">
       <p15:sldGuideLst xmlns:p15="http://schemas.microsoft.com/office/powerpoint/2012/main">
-        <p15:guide id="1" orient="horz" pos="2176" userDrawn="1">
+        <p15:guide id="1" orient="horz" pos="2160" userDrawn="1">
           <p15:clr>
             <a:srgbClr val="A4A3A4"/>
           </p15:clr>
         </p15:guide>
-        <p15:guide id="2" pos="3840" userDrawn="1">
+        <p15:guide id="2" pos="3816" userDrawn="1">
           <p15:clr>
             <a:srgbClr val="A4A3A4"/>
           </p15:clr>
@@ -9042,28 +9042,6 @@
           <a:chExt cx="0" cy="0"/>
         </a:xfrm>
       </p:grpSpPr>
-      <p:sp>
-        <p:nvSpPr>
-          <p:cNvPr id="11" name="Shape"/>
-          <p:cNvSpPr/>
-          <p:nvPr/>
-        </p:nvSpPr>
-        <p:spPr>
-          <a:xfrm>
-            <a:off x="0" y="0"/>
-            <a:ext cx="12191695" cy="6858000"/>
-          </a:xfrm>
-          <a:prstGeom prst="rect">
-            <a:avLst/>
-          </a:prstGeom>
-          <a:solidFill>
-            <a:srgbClr val="F8F6F2"/>
-          </a:solidFill>
-          <a:ln>
-            <a:noFill/>
-          </a:ln>
-        </p:spPr>
-      </p:sp>
       <p:sp>
         <p:nvSpPr>
           <p:cNvPr id="12" name="Shape"/>
@@ -11316,7 +11294,7 @@
         </p:nvSpPr>
         <p:spPr>
           <a:xfrm>
-            <a:off x="0" y="0"/>
+            <a:off x="0" y="71755"/>
             <a:ext cx="12191695" cy="6858000"/>
           </a:xfrm>
           <a:prstGeom prst="rect">
@@ -13493,7 +13471,7 @@
         <p:spPr>
           <a:xfrm>
             <a:off x="0" y="0"/>
-            <a:ext cx="12191695" cy="6858000"/>
+            <a:ext cx="12192000" cy="914400"/>
           </a:xfrm>
           <a:prstGeom prst="rect">
             <a:avLst/>
@@ -16787,7 +16765,7 @@
         <p:spPr>
           <a:xfrm>
             <a:off x="0" y="0"/>
-            <a:ext cx="12191695" cy="6858000"/>
+            <a:ext cx="12192000" cy="1078230"/>
           </a:xfrm>
           <a:prstGeom prst="rect">
             <a:avLst/>
@@ -17607,7 +17585,7 @@
         <p:spPr>
           <a:xfrm>
             <a:off x="0" y="0"/>
-            <a:ext cx="12191695" cy="6858000"/>
+            <a:ext cx="12192000" cy="1078230"/>
           </a:xfrm>
           <a:prstGeom prst="rect">
             <a:avLst/>
@@ -18497,28 +18475,6 @@
           <a:chExt cx="0" cy="0"/>
         </a:xfrm>
       </p:grpSpPr>
-      <p:sp>
-        <p:nvSpPr>
-          <p:cNvPr id="11" name="Shape"/>
-          <p:cNvSpPr/>
-          <p:nvPr/>
-        </p:nvSpPr>
-        <p:spPr>
-          <a:xfrm>
-            <a:off x="0" y="0"/>
-            <a:ext cx="12191695" cy="6858000"/>
-          </a:xfrm>
-          <a:prstGeom prst="rect">
-            <a:avLst/>
-          </a:prstGeom>
-          <a:solidFill>
-            <a:srgbClr val="FBFBFA"/>
-          </a:solidFill>
-          <a:ln>
-            <a:noFill/>
-          </a:ln>
-        </p:spPr>
-      </p:sp>
       <p:sp>
         <p:nvSpPr>
           <p:cNvPr id="12" name="Shape"/>
@@ -19292,28 +19248,6 @@
       </p:grpSpPr>
       <p:sp>
         <p:nvSpPr>
-          <p:cNvPr id="11" name="Shape"/>
-          <p:cNvSpPr/>
-          <p:nvPr/>
-        </p:nvSpPr>
-        <p:spPr>
-          <a:xfrm>
-            <a:off x="0" y="0"/>
-            <a:ext cx="12191695" cy="6858000"/>
-          </a:xfrm>
-          <a:prstGeom prst="rect">
-            <a:avLst/>
-          </a:prstGeom>
-          <a:solidFill>
-            <a:srgbClr val="FBFBFA"/>
-          </a:solidFill>
-          <a:ln>
-            <a:noFill/>
-          </a:ln>
-        </p:spPr>
-      </p:sp>
-      <p:sp>
-        <p:nvSpPr>
           <p:cNvPr id="12" name="Shape"/>
           <p:cNvSpPr/>
           <p:nvPr/>
@@ -19794,28 +19728,6 @@
           <a:chExt cx="0" cy="0"/>
         </a:xfrm>
       </p:grpSpPr>
-      <p:sp>
-        <p:nvSpPr>
-          <p:cNvPr id="11" name="Shape"/>
-          <p:cNvSpPr/>
-          <p:nvPr/>
-        </p:nvSpPr>
-        <p:spPr>
-          <a:xfrm>
-            <a:off x="0" y="0"/>
-            <a:ext cx="12191695" cy="6858000"/>
-          </a:xfrm>
-          <a:prstGeom prst="rect">
-            <a:avLst/>
-          </a:prstGeom>
-          <a:solidFill>
-            <a:srgbClr val="FBFBFA"/>
-          </a:solidFill>
-          <a:ln>
-            <a:noFill/>
-          </a:ln>
-        </p:spPr>
-      </p:sp>
       <p:sp>
         <p:nvSpPr>
           <p:cNvPr id="12" name="Shape"/>
